--- a/presentations/start-02-first-four-weeks/Start_02_First_Four_Weeks_Narrated.pptx
+++ b/presentations/start-02-first-four-weeks/Start_02_First_Four_Weeks_Narrated.pptx
@@ -169,7 +169,7 @@
     </p:spTree>
     <p:extLst>
       <p:ext uri="{BB962C8B-B14F-4D97-AF65-F5344CB8AC3E}">
-        <p14:creationId xmlns:p14="http://schemas.microsoft.com/office/powerpoint/2010/main" val="475840828"/>
+        <p14:creationId xmlns:p14="http://schemas.microsoft.com/office/powerpoint/2010/main" val="1988914516"/>
       </p:ext>
     </p:extLst>
   </p:cSld>
@@ -2190,7 +2190,7 @@
             <a:hlinkClick r:id="" action="ppaction://media"/>
             <a:extLst>
               <a:ext uri="{FF2B5EF4-FFF2-40B4-BE49-F238E27FC236}">
-                <a16:creationId xmlns:a16="http://schemas.microsoft.com/office/drawing/2014/main" id="{76A6853D-6998-067A-E736-897CB32A20BD}"/>
+                <a16:creationId xmlns:a16="http://schemas.microsoft.com/office/drawing/2014/main" id="{18B3281C-0E81-84AB-D89C-AACC64E09EF5}"/>
               </a:ext>
             </a:extLst>
           </p:cNvPr>
@@ -2206,7 +2206,7 @@
                     <p:ext uri="{3AFAAA56-56D3-431D-BCD4-E75A35582382}">
                       <p173:tracksInfo xmlns:p173="http://schemas.microsoft.com/office/powerpoint/2017/3/main" displayLoc="slide">
                         <p173:trackLst>
-                          <p173:track id="{131CF13D-677D-4505-8F93-AB316E49A218}" label="English (captions)" lang="en-US" r:embed="rId6"/>
+                          <p173:track id="{9D4F5282-1F0B-4A3D-934D-EE01A5CED97C}" label="English (captions)" lang="en-US" r:embed="rId6"/>
                         </p173:trackLst>
                       </p173:tracksInfo>
                     </p:ext>
@@ -2224,7 +2224,7 @@
         </p:blipFill>
         <p:spPr>
           <a:xfrm>
-            <a:off x="127000" y="6350000"/>
+            <a:off x="12446000" y="127000"/>
             <a:ext cx="304800" cy="304800"/>
           </a:xfrm>
           <a:prstGeom prst="rect">
@@ -3434,7 +3434,7 @@
             <a:hlinkClick r:id="" action="ppaction://media"/>
             <a:extLst>
               <a:ext uri="{FF2B5EF4-FFF2-40B4-BE49-F238E27FC236}">
-                <a16:creationId xmlns:a16="http://schemas.microsoft.com/office/drawing/2014/main" id="{62B2AFCC-8FCC-FDDE-E213-9AE90A6AD262}"/>
+                <a16:creationId xmlns:a16="http://schemas.microsoft.com/office/drawing/2014/main" id="{67651867-5CF3-E915-356C-BDCB5EE5620D}"/>
               </a:ext>
             </a:extLst>
           </p:cNvPr>
@@ -3450,7 +3450,7 @@
                     <p:ext uri="{3AFAAA56-56D3-431D-BCD4-E75A35582382}">
                       <p173:tracksInfo xmlns:p173="http://schemas.microsoft.com/office/powerpoint/2017/3/main" displayLoc="slide">
                         <p173:trackLst>
-                          <p173:track id="{5FE7FBC4-F588-4693-9CD5-FFE439D1652D}" label="English (captions)" lang="en-US" r:embed="rId7"/>
+                          <p173:track id="{B9CEE282-603E-4665-8800-1AE9A2E58492}" label="English (captions)" lang="en-US" r:embed="rId7"/>
                         </p173:trackLst>
                       </p173:tracksInfo>
                     </p:ext>
@@ -3468,7 +3468,7 @@
         </p:blipFill>
         <p:spPr>
           <a:xfrm>
-            <a:off x="127000" y="6350000"/>
+            <a:off x="12446000" y="127000"/>
             <a:ext cx="304800" cy="304800"/>
           </a:xfrm>
           <a:prstGeom prst="rect">
@@ -4891,7 +4891,7 @@
             <a:hlinkClick r:id="" action="ppaction://media"/>
             <a:extLst>
               <a:ext uri="{FF2B5EF4-FFF2-40B4-BE49-F238E27FC236}">
-                <a16:creationId xmlns:a16="http://schemas.microsoft.com/office/drawing/2014/main" id="{83DE43A0-A095-B843-3989-50974A53272D}"/>
+                <a16:creationId xmlns:a16="http://schemas.microsoft.com/office/drawing/2014/main" id="{102D393D-DFFE-3E4C-9C20-D9697B4C5605}"/>
               </a:ext>
             </a:extLst>
           </p:cNvPr>
@@ -4907,7 +4907,7 @@
                     <p:ext uri="{3AFAAA56-56D3-431D-BCD4-E75A35582382}">
                       <p173:tracksInfo xmlns:p173="http://schemas.microsoft.com/office/powerpoint/2017/3/main" displayLoc="slide">
                         <p173:trackLst>
-                          <p173:track id="{19558CE5-B37A-4641-9EFD-434C666F7C21}" label="English (captions)" lang="en-US" r:embed="rId7"/>
+                          <p173:track id="{83E59E55-BD3C-4976-86DC-CC5FC742AD25}" label="English (captions)" lang="en-US" r:embed="rId7"/>
                         </p173:trackLst>
                       </p173:tracksInfo>
                     </p:ext>
@@ -4925,7 +4925,7 @@
         </p:blipFill>
         <p:spPr>
           <a:xfrm>
-            <a:off x="127000" y="6350000"/>
+            <a:off x="12446000" y="127000"/>
             <a:ext cx="304800" cy="304800"/>
           </a:xfrm>
           <a:prstGeom prst="rect">
@@ -5882,7 +5882,7 @@
             <a:hlinkClick r:id="" action="ppaction://media"/>
             <a:extLst>
               <a:ext uri="{FF2B5EF4-FFF2-40B4-BE49-F238E27FC236}">
-                <a16:creationId xmlns:a16="http://schemas.microsoft.com/office/drawing/2014/main" id="{FC407A40-A051-7B65-D019-1C506FAFE1C1}"/>
+                <a16:creationId xmlns:a16="http://schemas.microsoft.com/office/drawing/2014/main" id="{F91325B1-64E2-CD4B-425F-D3EED11C2DA9}"/>
               </a:ext>
             </a:extLst>
           </p:cNvPr>
@@ -5898,7 +5898,7 @@
                     <p:ext uri="{3AFAAA56-56D3-431D-BCD4-E75A35582382}">
                       <p173:tracksInfo xmlns:p173="http://schemas.microsoft.com/office/powerpoint/2017/3/main" displayLoc="slide">
                         <p173:trackLst>
-                          <p173:track id="{E13F55B1-5B0E-4CC9-BEB1-4B0542E373D1}" label="English (captions)" lang="en-US" r:embed="rId8"/>
+                          <p173:track id="{2AD5ABA1-1E92-44D4-BF3F-C2BD99414A04}" label="English (captions)" lang="en-US" r:embed="rId8"/>
                         </p173:trackLst>
                       </p173:tracksInfo>
                     </p:ext>
@@ -5916,7 +5916,7 @@
         </p:blipFill>
         <p:spPr>
           <a:xfrm>
-            <a:off x="127000" y="6350000"/>
+            <a:off x="12446000" y="127000"/>
             <a:ext cx="304800" cy="304800"/>
           </a:xfrm>
           <a:prstGeom prst="rect">
@@ -6989,7 +6989,7 @@
             <a:hlinkClick r:id="" action="ppaction://media"/>
             <a:extLst>
               <a:ext uri="{FF2B5EF4-FFF2-40B4-BE49-F238E27FC236}">
-                <a16:creationId xmlns:a16="http://schemas.microsoft.com/office/drawing/2014/main" id="{98DA8C8F-6458-6ACE-9D08-EEBD6DD63536}"/>
+                <a16:creationId xmlns:a16="http://schemas.microsoft.com/office/drawing/2014/main" id="{F50BEFCC-ADE9-8D9D-C2F1-00C73D1E1128}"/>
               </a:ext>
             </a:extLst>
           </p:cNvPr>
@@ -7005,7 +7005,7 @@
                     <p:ext uri="{3AFAAA56-56D3-431D-BCD4-E75A35582382}">
                       <p173:tracksInfo xmlns:p173="http://schemas.microsoft.com/office/powerpoint/2017/3/main" displayLoc="slide">
                         <p173:trackLst>
-                          <p173:track id="{F92900F9-3D32-458D-A607-BA21EB3830D6}" label="English (captions)" lang="en-US" r:embed="rId6"/>
+                          <p173:track id="{AB2B3571-CBC6-4602-8401-D503DB042EB1}" label="English (captions)" lang="en-US" r:embed="rId6"/>
                         </p173:trackLst>
                       </p173:tracksInfo>
                     </p:ext>
@@ -7023,7 +7023,7 @@
         </p:blipFill>
         <p:spPr>
           <a:xfrm>
-            <a:off x="127000" y="6350000"/>
+            <a:off x="12446000" y="127000"/>
             <a:ext cx="304800" cy="304800"/>
           </a:xfrm>
           <a:prstGeom prst="rect">
@@ -7560,7 +7560,7 @@
             <a:hlinkClick r:id="" action="ppaction://media"/>
             <a:extLst>
               <a:ext uri="{FF2B5EF4-FFF2-40B4-BE49-F238E27FC236}">
-                <a16:creationId xmlns:a16="http://schemas.microsoft.com/office/drawing/2014/main" id="{07CC68A2-0759-C11A-837E-B2A577E9520B}"/>
+                <a16:creationId xmlns:a16="http://schemas.microsoft.com/office/drawing/2014/main" id="{210066CA-2D6F-FBC7-65C5-11AC56DC3F28}"/>
               </a:ext>
             </a:extLst>
           </p:cNvPr>
@@ -7576,7 +7576,7 @@
                     <p:ext uri="{3AFAAA56-56D3-431D-BCD4-E75A35582382}">
                       <p173:tracksInfo xmlns:p173="http://schemas.microsoft.com/office/powerpoint/2017/3/main" displayLoc="slide">
                         <p173:trackLst>
-                          <p173:track id="{C79E69C1-B115-455A-B5DF-89A654FF9A6C}" label="English (captions)" lang="en-US" r:embed="rId7"/>
+                          <p173:track id="{2B39629E-6F31-4673-BEDD-283B92429657}" label="English (captions)" lang="en-US" r:embed="rId7"/>
                         </p173:trackLst>
                       </p173:tracksInfo>
                     </p:ext>
@@ -7594,7 +7594,7 @@
         </p:blipFill>
         <p:spPr>
           <a:xfrm>
-            <a:off x="127000" y="6350000"/>
+            <a:off x="12446000" y="127000"/>
             <a:ext cx="304800" cy="304800"/>
           </a:xfrm>
           <a:prstGeom prst="rect">
@@ -8113,7 +8113,7 @@
             <a:hlinkClick r:id="" action="ppaction://media"/>
             <a:extLst>
               <a:ext uri="{FF2B5EF4-FFF2-40B4-BE49-F238E27FC236}">
-                <a16:creationId xmlns:a16="http://schemas.microsoft.com/office/drawing/2014/main" id="{F0DEA56C-1DCD-F1FF-B45A-6BF03C8ACB83}"/>
+                <a16:creationId xmlns:a16="http://schemas.microsoft.com/office/drawing/2014/main" id="{D06A0784-A0E4-194D-96E3-5955595E7435}"/>
               </a:ext>
             </a:extLst>
           </p:cNvPr>
@@ -8129,7 +8129,7 @@
                     <p:ext uri="{3AFAAA56-56D3-431D-BCD4-E75A35582382}">
                       <p173:tracksInfo xmlns:p173="http://schemas.microsoft.com/office/powerpoint/2017/3/main" displayLoc="slide">
                         <p173:trackLst>
-                          <p173:track id="{9ED40B52-7FFC-4329-AACE-0244AFD1BF51}" label="English (captions)" lang="en-US" r:embed="rId7"/>
+                          <p173:track id="{521D4711-162B-4918-BA0F-26149A6EA148}" label="English (captions)" lang="en-US" r:embed="rId7"/>
                         </p173:trackLst>
                       </p173:tracksInfo>
                     </p:ext>
@@ -8147,7 +8147,7 @@
         </p:blipFill>
         <p:spPr>
           <a:xfrm>
-            <a:off x="127000" y="6350000"/>
+            <a:off x="12446000" y="127000"/>
             <a:ext cx="304800" cy="304800"/>
           </a:xfrm>
           <a:prstGeom prst="rect">
@@ -10126,7 +10126,7 @@
             <a:hlinkClick r:id="" action="ppaction://media"/>
             <a:extLst>
               <a:ext uri="{FF2B5EF4-FFF2-40B4-BE49-F238E27FC236}">
-                <a16:creationId xmlns:a16="http://schemas.microsoft.com/office/drawing/2014/main" id="{B7D0D632-9C92-108B-BF87-44BC87EDCF14}"/>
+                <a16:creationId xmlns:a16="http://schemas.microsoft.com/office/drawing/2014/main" id="{9BFC4AD0-70AC-A874-005B-36205975A746}"/>
               </a:ext>
             </a:extLst>
           </p:cNvPr>
@@ -10142,7 +10142,7 @@
                     <p:ext uri="{3AFAAA56-56D3-431D-BCD4-E75A35582382}">
                       <p173:tracksInfo xmlns:p173="http://schemas.microsoft.com/office/powerpoint/2017/3/main" displayLoc="slide">
                         <p173:trackLst>
-                          <p173:track id="{35A806A8-9537-4922-9FC9-1654A91C1DD9}" label="English (captions)" lang="en-US" r:embed="rId7"/>
+                          <p173:track id="{43898B9F-45CC-4751-AD68-FF3C5CEDC2F2}" label="English (captions)" lang="en-US" r:embed="rId7"/>
                         </p173:trackLst>
                       </p173:tracksInfo>
                     </p:ext>
@@ -10160,7 +10160,7 @@
         </p:blipFill>
         <p:spPr>
           <a:xfrm>
-            <a:off x="127000" y="6350000"/>
+            <a:off x="12446000" y="127000"/>
             <a:ext cx="304800" cy="304800"/>
           </a:xfrm>
           <a:prstGeom prst="rect">
@@ -11005,7 +11005,7 @@
             <a:hlinkClick r:id="" action="ppaction://media"/>
             <a:extLst>
               <a:ext uri="{FF2B5EF4-FFF2-40B4-BE49-F238E27FC236}">
-                <a16:creationId xmlns:a16="http://schemas.microsoft.com/office/drawing/2014/main" id="{4E6D6209-44AC-4A16-EB42-13B74289D3CD}"/>
+                <a16:creationId xmlns:a16="http://schemas.microsoft.com/office/drawing/2014/main" id="{F4F1AEE5-BA58-894D-87EA-6BA8902428FA}"/>
               </a:ext>
             </a:extLst>
           </p:cNvPr>
@@ -11021,7 +11021,7 @@
                     <p:ext uri="{3AFAAA56-56D3-431D-BCD4-E75A35582382}">
                       <p173:tracksInfo xmlns:p173="http://schemas.microsoft.com/office/powerpoint/2017/3/main" displayLoc="slide">
                         <p173:trackLst>
-                          <p173:track id="{F2F0591F-77DB-4FBD-93F6-C3B0BF309971}" label="English (captions)" lang="en-US" r:embed="rId7"/>
+                          <p173:track id="{C8A174BA-0623-4FEA-B7DF-18759F7BB87D}" label="English (captions)" lang="en-US" r:embed="rId7"/>
                         </p173:trackLst>
                       </p173:tracksInfo>
                     </p:ext>
@@ -11039,7 +11039,7 @@
         </p:blipFill>
         <p:spPr>
           <a:xfrm>
-            <a:off x="127000" y="6350000"/>
+            <a:off x="12446000" y="127000"/>
             <a:ext cx="304800" cy="304800"/>
           </a:xfrm>
           <a:prstGeom prst="rect">
@@ -12392,7 +12392,7 @@
             <a:hlinkClick r:id="" action="ppaction://media"/>
             <a:extLst>
               <a:ext uri="{FF2B5EF4-FFF2-40B4-BE49-F238E27FC236}">
-                <a16:creationId xmlns:a16="http://schemas.microsoft.com/office/drawing/2014/main" id="{3D76B52D-B8BE-56F9-3A28-D1D4D41D599A}"/>
+                <a16:creationId xmlns:a16="http://schemas.microsoft.com/office/drawing/2014/main" id="{EC4AE9DC-9865-E031-1FFC-95B519FD85C4}"/>
               </a:ext>
             </a:extLst>
           </p:cNvPr>
@@ -12408,7 +12408,7 @@
                     <p:ext uri="{3AFAAA56-56D3-431D-BCD4-E75A35582382}">
                       <p173:tracksInfo xmlns:p173="http://schemas.microsoft.com/office/powerpoint/2017/3/main" displayLoc="slide">
                         <p173:trackLst>
-                          <p173:track id="{66536810-0CF5-43DC-92C5-29246E488135}" label="English (captions)" lang="en-US" r:embed="rId7"/>
+                          <p173:track id="{E3EBC5A9-73C1-41F3-8D70-3DA986725F18}" label="English (captions)" lang="en-US" r:embed="rId7"/>
                         </p173:trackLst>
                       </p173:tracksInfo>
                     </p:ext>
@@ -12426,7 +12426,7 @@
         </p:blipFill>
         <p:spPr>
           <a:xfrm>
-            <a:off x="127000" y="6350000"/>
+            <a:off x="12446000" y="127000"/>
             <a:ext cx="304800" cy="304800"/>
           </a:xfrm>
           <a:prstGeom prst="rect">
@@ -13823,7 +13823,7 @@
             <a:hlinkClick r:id="" action="ppaction://media"/>
             <a:extLst>
               <a:ext uri="{FF2B5EF4-FFF2-40B4-BE49-F238E27FC236}">
-                <a16:creationId xmlns:a16="http://schemas.microsoft.com/office/drawing/2014/main" id="{A3BFD901-FB39-2061-F01B-722763C64712}"/>
+                <a16:creationId xmlns:a16="http://schemas.microsoft.com/office/drawing/2014/main" id="{F48A1078-F179-AAB2-27E9-982F0C0C51F4}"/>
               </a:ext>
             </a:extLst>
           </p:cNvPr>
@@ -13839,7 +13839,7 @@
                     <p:ext uri="{3AFAAA56-56D3-431D-BCD4-E75A35582382}">
                       <p173:tracksInfo xmlns:p173="http://schemas.microsoft.com/office/powerpoint/2017/3/main" displayLoc="slide">
                         <p173:trackLst>
-                          <p173:track id="{F5F35B14-AFD8-4561-8FCB-874B70F9C23C}" label="English (captions)" lang="en-US" r:embed="rId7"/>
+                          <p173:track id="{F08F468A-E92D-4909-A677-6EBB71D0DCB4}" label="English (captions)" lang="en-US" r:embed="rId7"/>
                         </p173:trackLst>
                       </p173:tracksInfo>
                     </p:ext>
@@ -13857,7 +13857,7 @@
         </p:blipFill>
         <p:spPr>
           <a:xfrm>
-            <a:off x="127000" y="6350000"/>
+            <a:off x="12446000" y="127000"/>
             <a:ext cx="304800" cy="304800"/>
           </a:xfrm>
           <a:prstGeom prst="rect">
